--- a/resources/presentations/Lunch-Is-Packed-Module-10-test-evaluate-and-improve.pptx
+++ b/resources/presentations/Lunch-Is-Packed-Module-10-test-evaluate-and-improve.pptx
@@ -2,20 +2,20 @@
 <file path=ppt/presentation.xml><?xml version="1.0" encoding="utf-8"?>
 <p:presentation xmlns:p="http://schemas.openxmlformats.org/presentationml/2006/main">
   <p:sldMasterIdLst>
-    <p:sldMasterId xmlns:r="http://schemas.openxmlformats.org/officeDocument/2006/relationships" id="2147483648" r:id="R657e18a355404a62"/>
+    <p:sldMasterId xmlns:r="http://schemas.openxmlformats.org/officeDocument/2006/relationships" id="2147483648" r:id="Rcff8f65180884d7c"/>
   </p:sldMasterIdLst>
   <p:notesMasterIdLst>
-    <p:notesMasterId xmlns:r="http://schemas.openxmlformats.org/officeDocument/2006/relationships" r:id="Rc93c438c1c0d4bb6"/>
+    <p:notesMasterId xmlns:r="http://schemas.openxmlformats.org/officeDocument/2006/relationships" r:id="Rbdf9d9b7371c4a7d"/>
   </p:notesMasterIdLst>
   <p:sldIdLst>
-    <p:sldId xmlns:r="http://schemas.openxmlformats.org/officeDocument/2006/relationships" id="256" r:id="R3be1ec69492847f7"/>
-    <p:sldId xmlns:r="http://schemas.openxmlformats.org/officeDocument/2006/relationships" id="257" r:id="Rf1b382c86f7c4522"/>
-    <p:sldId xmlns:r="http://schemas.openxmlformats.org/officeDocument/2006/relationships" id="258" r:id="Re00c4380a69a4a5f"/>
-    <p:sldId xmlns:r="http://schemas.openxmlformats.org/officeDocument/2006/relationships" id="259" r:id="Ra4b6fa4960e54336"/>
-    <p:sldId xmlns:r="http://schemas.openxmlformats.org/officeDocument/2006/relationships" id="260" r:id="R9e48f0afe657469b"/>
-    <p:sldId xmlns:r="http://schemas.openxmlformats.org/officeDocument/2006/relationships" id="261" r:id="Rb7a22c1863234181"/>
-    <p:sldId xmlns:r="http://schemas.openxmlformats.org/officeDocument/2006/relationships" id="262" r:id="R3d1a9522409d49f3"/>
-    <p:sldId xmlns:r="http://schemas.openxmlformats.org/officeDocument/2006/relationships" id="263" r:id="R927cdfa9e4b64e57"/>
+    <p:sldId xmlns:r="http://schemas.openxmlformats.org/officeDocument/2006/relationships" id="256" r:id="R30d351778b2b4fea"/>
+    <p:sldId xmlns:r="http://schemas.openxmlformats.org/officeDocument/2006/relationships" id="257" r:id="R96c990de80324770"/>
+    <p:sldId xmlns:r="http://schemas.openxmlformats.org/officeDocument/2006/relationships" id="258" r:id="R0a4ad638b6904109"/>
+    <p:sldId xmlns:r="http://schemas.openxmlformats.org/officeDocument/2006/relationships" id="259" r:id="R65fcbec1ccf64451"/>
+    <p:sldId xmlns:r="http://schemas.openxmlformats.org/officeDocument/2006/relationships" id="260" r:id="Rd0a1c1edd99f4750"/>
+    <p:sldId xmlns:r="http://schemas.openxmlformats.org/officeDocument/2006/relationships" id="261" r:id="Rcef289edbc3c46c9"/>
+    <p:sldId xmlns:r="http://schemas.openxmlformats.org/officeDocument/2006/relationships" id="262" r:id="R3e354b64c72345f5"/>
+    <p:sldId xmlns:r="http://schemas.openxmlformats.org/officeDocument/2006/relationships" id="263" r:id="R9dbe77e2c1b4465e"/>
   </p:sldIdLst>
   <p:sldSz cx="12192000" cy="6858000"/>
   <p:notesSz cx="6858000" cy="9144000"/>
@@ -1127,7 +1127,7 @@
   </p:cSld>
   <p:clrMap bg1="lt1" tx1="dk1" bg2="lt2" tx2="dk2" accent1="accent1" accent2="accent2" accent3="accent3" accent4="accent4" accent5="accent5" accent6="accent6" hlink="hlink" folHlink="folHlink"/>
   <p:sldLayoutIdLst>
-    <p:sldLayoutId xmlns:r="http://schemas.openxmlformats.org/officeDocument/2006/relationships" id="2147483649" r:id="R8809e2eb125045dd"/>
+    <p:sldLayoutId xmlns:r="http://schemas.openxmlformats.org/officeDocument/2006/relationships" id="2147483649" r:id="R8260eb67bc4b43de"/>
   </p:sldLayoutIdLst>
   <p:txStyles>
     <p:titleStyle>
@@ -1678,7 +1678,7 @@
           <p:cNvPr id="7" name="title-plane">
             <a:extLst xmlns:a="http://schemas.openxmlformats.org/drawingml/2006/main">
               <a:ext uri="{FF2B5EF4-FFF2-40B4-BE49-F238E27FC236}">
-                <a16:creationId xmlns:a16="http://schemas.microsoft.com/office/drawing/2014/main" id="{510D8DAE-2F52-431D-BB84-B7F9C1ED7F71}"/>
+                <a16:creationId xmlns:a16="http://schemas.microsoft.com/office/drawing/2014/main" id="{58AAFA27-8D68-4D3A-BE22-14E6B06D50E2}"/>
               </a:ext>
             </a:extLst>
           </p:cNvPr>
@@ -1713,8 +1713,8 @@
           <p:nvPr/>
         </p:nvPicPr>
         <p:blipFill>
-          <a:blip xmlns:r="http://schemas.openxmlformats.org/officeDocument/2006/relationships" xmlns:a="http://schemas.openxmlformats.org/drawingml/2006/main" r:embed="R3727e9854b804c59"/>
-          <a:srcRect xmlns:a="http://schemas.openxmlformats.org/drawingml/2006/main" l="30134" t="0" r="30134" b="0"/>
+          <a:blip xmlns:r="http://schemas.openxmlformats.org/officeDocument/2006/relationships" xmlns:a="http://schemas.openxmlformats.org/drawingml/2006/main" r:embed="R9318a4fbb53844a7"/>
+          <a:srcRect xmlns:a="http://schemas.openxmlformats.org/drawingml/2006/main" l="24074" t="0" r="24074" b="0"/>
           <a:stretch xmlns:a="http://schemas.openxmlformats.org/drawingml/2006/main">
             <a:fillRect l="0" t="0" r="0" b="0"/>
           </a:stretch>
@@ -1734,7 +1734,7 @@
           <p:cNvPr id="3" name="module-kicker">
             <a:extLst xmlns:a="http://schemas.openxmlformats.org/drawingml/2006/main">
               <a:ext uri="{FF2B5EF4-FFF2-40B4-BE49-F238E27FC236}">
-                <a16:creationId xmlns:a16="http://schemas.microsoft.com/office/drawing/2014/main" id="{FFA76799-F849-49D1-B3A6-1DD688B9C1CA}"/>
+                <a16:creationId xmlns:a16="http://schemas.microsoft.com/office/drawing/2014/main" id="{0D45F81D-1E14-4832-849E-371DE487389E}"/>
               </a:ext>
             </a:extLst>
           </p:cNvPr>
@@ -1784,7 +1784,7 @@
           <p:cNvPr id="4" name="deck-title">
             <a:extLst xmlns:a="http://schemas.openxmlformats.org/drawingml/2006/main">
               <a:ext uri="{FF2B5EF4-FFF2-40B4-BE49-F238E27FC236}">
-                <a16:creationId xmlns:a16="http://schemas.microsoft.com/office/drawing/2014/main" id="{137225EA-FEFD-47B4-B44F-41A0EACB1D64}"/>
+                <a16:creationId xmlns:a16="http://schemas.microsoft.com/office/drawing/2014/main" id="{77993E57-B731-40FE-B246-38BA776E08DA}"/>
               </a:ext>
             </a:extLst>
           </p:cNvPr>
@@ -1834,7 +1834,7 @@
           <p:cNvPr id="5" name="deck-subtitle">
             <a:extLst xmlns:a="http://schemas.openxmlformats.org/drawingml/2006/main">
               <a:ext uri="{FF2B5EF4-FFF2-40B4-BE49-F238E27FC236}">
-                <a16:creationId xmlns:a16="http://schemas.microsoft.com/office/drawing/2014/main" id="{95F78F14-F2FF-4C9B-98FD-3AE3E6E2922A}"/>
+                <a16:creationId xmlns:a16="http://schemas.microsoft.com/office/drawing/2014/main" id="{15103F31-E0C2-4637-A481-242AB29BF7DC}"/>
               </a:ext>
             </a:extLst>
           </p:cNvPr>
@@ -1884,7 +1884,7 @@
           <p:cNvPr id="6" name="deck-footer">
             <a:extLst xmlns:a="http://schemas.openxmlformats.org/drawingml/2006/main">
               <a:ext uri="{FF2B5EF4-FFF2-40B4-BE49-F238E27FC236}">
-                <a16:creationId xmlns:a16="http://schemas.microsoft.com/office/drawing/2014/main" id="{93D7E45F-1B17-47A2-B27A-7859EF0F0F56}"/>
+                <a16:creationId xmlns:a16="http://schemas.microsoft.com/office/drawing/2014/main" id="{B8A30814-DC6D-43C9-A2EE-802B51C8A420}"/>
               </a:ext>
             </a:extLst>
           </p:cNvPr>
@@ -1932,7 +1932,7 @@
     </p:spTree>
     <p:extLst>
       <p:ext uri="{BB962C8B-B14F-4D97-AF65-F5344CB8AC3E}">
-        <p14:creationId xmlns:p14="http://schemas.microsoft.com/office/powerpoint/2010/main" val="808906730"/>
+        <p14:creationId xmlns:p14="http://schemas.microsoft.com/office/powerpoint/2010/main" val="8881746"/>
       </p:ext>
     </p:extLst>
   </p:cSld>
@@ -1963,7 +1963,7 @@
           <p:cNvPr id="15" name="top-rule">
             <a:extLst xmlns:a="http://schemas.openxmlformats.org/drawingml/2006/main">
               <a:ext uri="{FF2B5EF4-FFF2-40B4-BE49-F238E27FC236}">
-                <a16:creationId xmlns:a16="http://schemas.microsoft.com/office/drawing/2014/main" id="{E9D0532F-0EF9-410A-9149-CDB4E1113883}"/>
+                <a16:creationId xmlns:a16="http://schemas.microsoft.com/office/drawing/2014/main" id="{C3D57347-ACE8-4F32-93B4-D00706C02D3B}"/>
               </a:ext>
             </a:extLst>
           </p:cNvPr>
@@ -1994,7 +1994,7 @@
           <p:cNvPr id="2" name="course-label">
             <a:extLst xmlns:a="http://schemas.openxmlformats.org/drawingml/2006/main">
               <a:ext uri="{FF2B5EF4-FFF2-40B4-BE49-F238E27FC236}">
-                <a16:creationId xmlns:a16="http://schemas.microsoft.com/office/drawing/2014/main" id="{8DD02113-93CC-41EB-980F-48F13F1936E7}"/>
+                <a16:creationId xmlns:a16="http://schemas.microsoft.com/office/drawing/2014/main" id="{2377FDC9-5D35-4218-848D-1A4F15C1DEF3}"/>
               </a:ext>
             </a:extLst>
           </p:cNvPr>
@@ -2044,7 +2044,7 @@
           <p:cNvPr id="3" name="module-label">
             <a:extLst xmlns:a="http://schemas.openxmlformats.org/drawingml/2006/main">
               <a:ext uri="{FF2B5EF4-FFF2-40B4-BE49-F238E27FC236}">
-                <a16:creationId xmlns:a16="http://schemas.microsoft.com/office/drawing/2014/main" id="{FC540B8B-EB65-4DF4-857A-3F9AC0EA6F0E}"/>
+                <a16:creationId xmlns:a16="http://schemas.microsoft.com/office/drawing/2014/main" id="{6205FCFA-6333-41D6-8FC2-2CFEFF05E861}"/>
               </a:ext>
             </a:extLst>
           </p:cNvPr>
@@ -2094,7 +2094,7 @@
           <p:cNvPr id="4" name="slide-title">
             <a:extLst xmlns:a="http://schemas.openxmlformats.org/drawingml/2006/main">
               <a:ext uri="{FF2B5EF4-FFF2-40B4-BE49-F238E27FC236}">
-                <a16:creationId xmlns:a16="http://schemas.microsoft.com/office/drawing/2014/main" id="{F7D79E58-C6C5-492B-A1C7-519C1A06D02B}"/>
+                <a16:creationId xmlns:a16="http://schemas.microsoft.com/office/drawing/2014/main" id="{39CFBD90-D55C-48B2-B043-82D9A981D7BF}"/>
               </a:ext>
             </a:extLst>
           </p:cNvPr>
@@ -2144,7 +2144,7 @@
           <p:cNvPr id="5" name="slide-subtitle">
             <a:extLst xmlns:a="http://schemas.openxmlformats.org/drawingml/2006/main">
               <a:ext uri="{FF2B5EF4-FFF2-40B4-BE49-F238E27FC236}">
-                <a16:creationId xmlns:a16="http://schemas.microsoft.com/office/drawing/2014/main" id="{895ACAC3-FD84-4FDD-8A15-D992087974D8}"/>
+                <a16:creationId xmlns:a16="http://schemas.microsoft.com/office/drawing/2014/main" id="{FC584FF8-9F72-4FE3-9716-9BECAB38119E}"/>
               </a:ext>
             </a:extLst>
           </p:cNvPr>
@@ -2194,7 +2194,7 @@
           <p:cNvPr id="6" name="bullet-1">
             <a:extLst xmlns:a="http://schemas.openxmlformats.org/drawingml/2006/main">
               <a:ext uri="{FF2B5EF4-FFF2-40B4-BE49-F238E27FC236}">
-                <a16:creationId xmlns:a16="http://schemas.microsoft.com/office/drawing/2014/main" id="{0E760223-58D8-46DD-A789-D2B0CFA18D14}"/>
+                <a16:creationId xmlns:a16="http://schemas.microsoft.com/office/drawing/2014/main" id="{80E1CA9B-B1B7-42E7-9FDF-BCE1EC5BA3DB}"/>
               </a:ext>
             </a:extLst>
           </p:cNvPr>
@@ -2225,7 +2225,7 @@
           <p:cNvPr id="7" name="bullet-number-1">
             <a:extLst xmlns:a="http://schemas.openxmlformats.org/drawingml/2006/main">
               <a:ext uri="{FF2B5EF4-FFF2-40B4-BE49-F238E27FC236}">
-                <a16:creationId xmlns:a16="http://schemas.microsoft.com/office/drawing/2014/main" id="{D9098014-CCDA-4360-9482-36258C8518F8}"/>
+                <a16:creationId xmlns:a16="http://schemas.microsoft.com/office/drawing/2014/main" id="{CEF3AD48-8475-416E-BBAA-42522FDA7082}"/>
               </a:ext>
             </a:extLst>
           </p:cNvPr>
@@ -2275,7 +2275,7 @@
           <p:cNvPr id="8" name="bullet-copy-1">
             <a:extLst xmlns:a="http://schemas.openxmlformats.org/drawingml/2006/main">
               <a:ext uri="{FF2B5EF4-FFF2-40B4-BE49-F238E27FC236}">
-                <a16:creationId xmlns:a16="http://schemas.microsoft.com/office/drawing/2014/main" id="{A7AB5F4C-E5AC-4B5C-AFD8-0873A00CEA29}"/>
+                <a16:creationId xmlns:a16="http://schemas.microsoft.com/office/drawing/2014/main" id="{21238FF8-DBDC-470D-BCF4-EA1840F772FD}"/>
               </a:ext>
             </a:extLst>
           </p:cNvPr>
@@ -2325,7 +2325,7 @@
           <p:cNvPr id="9" name="bullet-2">
             <a:extLst xmlns:a="http://schemas.openxmlformats.org/drawingml/2006/main">
               <a:ext uri="{FF2B5EF4-FFF2-40B4-BE49-F238E27FC236}">
-                <a16:creationId xmlns:a16="http://schemas.microsoft.com/office/drawing/2014/main" id="{95ACC6CF-7851-4DBB-A2A8-05E6093C4482}"/>
+                <a16:creationId xmlns:a16="http://schemas.microsoft.com/office/drawing/2014/main" id="{C61DEB05-BE30-467D-A877-79CD8C187214}"/>
               </a:ext>
             </a:extLst>
           </p:cNvPr>
@@ -2356,7 +2356,7 @@
           <p:cNvPr id="10" name="bullet-number-2">
             <a:extLst xmlns:a="http://schemas.openxmlformats.org/drawingml/2006/main">
               <a:ext uri="{FF2B5EF4-FFF2-40B4-BE49-F238E27FC236}">
-                <a16:creationId xmlns:a16="http://schemas.microsoft.com/office/drawing/2014/main" id="{1124C5C8-C581-47A0-B44E-DEAF267EC3C1}"/>
+                <a16:creationId xmlns:a16="http://schemas.microsoft.com/office/drawing/2014/main" id="{BA279737-4B10-46EC-B26E-4A33D4D65292}"/>
               </a:ext>
             </a:extLst>
           </p:cNvPr>
@@ -2406,7 +2406,7 @@
           <p:cNvPr id="11" name="bullet-copy-2">
             <a:extLst xmlns:a="http://schemas.openxmlformats.org/drawingml/2006/main">
               <a:ext uri="{FF2B5EF4-FFF2-40B4-BE49-F238E27FC236}">
-                <a16:creationId xmlns:a16="http://schemas.microsoft.com/office/drawing/2014/main" id="{C001E416-9A68-46D2-AB39-442C09724421}"/>
+                <a16:creationId xmlns:a16="http://schemas.microsoft.com/office/drawing/2014/main" id="{589FD178-EB43-49FE-9666-0A42308AED0A}"/>
               </a:ext>
             </a:extLst>
           </p:cNvPr>
@@ -2456,7 +2456,7 @@
           <p:cNvPr id="12" name="bullet-3">
             <a:extLst xmlns:a="http://schemas.openxmlformats.org/drawingml/2006/main">
               <a:ext uri="{FF2B5EF4-FFF2-40B4-BE49-F238E27FC236}">
-                <a16:creationId xmlns:a16="http://schemas.microsoft.com/office/drawing/2014/main" id="{3C5151F7-8CE8-4AA7-A6FB-6B89ED8A17FF}"/>
+                <a16:creationId xmlns:a16="http://schemas.microsoft.com/office/drawing/2014/main" id="{6CA1D727-2754-4983-9F3B-A5D7CAD02EE8}"/>
               </a:ext>
             </a:extLst>
           </p:cNvPr>
@@ -2487,7 +2487,7 @@
           <p:cNvPr id="13" name="bullet-number-3">
             <a:extLst xmlns:a="http://schemas.openxmlformats.org/drawingml/2006/main">
               <a:ext uri="{FF2B5EF4-FFF2-40B4-BE49-F238E27FC236}">
-                <a16:creationId xmlns:a16="http://schemas.microsoft.com/office/drawing/2014/main" id="{CDBEEA0E-ECEA-4EA9-88BB-A0E260F0B9F9}"/>
+                <a16:creationId xmlns:a16="http://schemas.microsoft.com/office/drawing/2014/main" id="{F42806CB-5FCF-446F-9122-7284977DE58A}"/>
               </a:ext>
             </a:extLst>
           </p:cNvPr>
@@ -2537,7 +2537,7 @@
           <p:cNvPr id="14" name="bullet-copy-3">
             <a:extLst xmlns:a="http://schemas.openxmlformats.org/drawingml/2006/main">
               <a:ext uri="{FF2B5EF4-FFF2-40B4-BE49-F238E27FC236}">
-                <a16:creationId xmlns:a16="http://schemas.microsoft.com/office/drawing/2014/main" id="{9963531F-7B17-4B5E-880D-5EE8222CEC23}"/>
+                <a16:creationId xmlns:a16="http://schemas.microsoft.com/office/drawing/2014/main" id="{DCEDE004-B508-4951-A6B5-8871066821B8}"/>
               </a:ext>
             </a:extLst>
           </p:cNvPr>
@@ -2585,7 +2585,7 @@
     </p:spTree>
     <p:extLst>
       <p:ext uri="{BB962C8B-B14F-4D97-AF65-F5344CB8AC3E}">
-        <p14:creationId xmlns:p14="http://schemas.microsoft.com/office/powerpoint/2010/main" val="606430308"/>
+        <p14:creationId xmlns:p14="http://schemas.microsoft.com/office/powerpoint/2010/main" val="511909521"/>
       </p:ext>
     </p:extLst>
   </p:cSld>
@@ -2616,7 +2616,7 @@
           <p:cNvPr id="15" name="top-rule">
             <a:extLst xmlns:a="http://schemas.openxmlformats.org/drawingml/2006/main">
               <a:ext uri="{FF2B5EF4-FFF2-40B4-BE49-F238E27FC236}">
-                <a16:creationId xmlns:a16="http://schemas.microsoft.com/office/drawing/2014/main" id="{5670B55D-FFA5-4945-91F2-E1584DAB5126}"/>
+                <a16:creationId xmlns:a16="http://schemas.microsoft.com/office/drawing/2014/main" id="{73AEDDD2-42C4-4E35-8BBF-6E152CF3E098}"/>
               </a:ext>
             </a:extLst>
           </p:cNvPr>
@@ -2647,7 +2647,7 @@
           <p:cNvPr id="2" name="course-label">
             <a:extLst xmlns:a="http://schemas.openxmlformats.org/drawingml/2006/main">
               <a:ext uri="{FF2B5EF4-FFF2-40B4-BE49-F238E27FC236}">
-                <a16:creationId xmlns:a16="http://schemas.microsoft.com/office/drawing/2014/main" id="{11023994-F2A4-4C2B-9E8C-6B0E828E5E02}"/>
+                <a16:creationId xmlns:a16="http://schemas.microsoft.com/office/drawing/2014/main" id="{2AD5A40E-8E30-4564-A18F-285EEB7F266C}"/>
               </a:ext>
             </a:extLst>
           </p:cNvPr>
@@ -2697,7 +2697,7 @@
           <p:cNvPr id="3" name="module-label">
             <a:extLst xmlns:a="http://schemas.openxmlformats.org/drawingml/2006/main">
               <a:ext uri="{FF2B5EF4-FFF2-40B4-BE49-F238E27FC236}">
-                <a16:creationId xmlns:a16="http://schemas.microsoft.com/office/drawing/2014/main" id="{455DE288-02EE-4CAE-866A-34080E75928C}"/>
+                <a16:creationId xmlns:a16="http://schemas.microsoft.com/office/drawing/2014/main" id="{B33A4248-66B8-4E33-AEFA-FEDBF3623BD8}"/>
               </a:ext>
             </a:extLst>
           </p:cNvPr>
@@ -2747,7 +2747,7 @@
           <p:cNvPr id="4" name="slide-title">
             <a:extLst xmlns:a="http://schemas.openxmlformats.org/drawingml/2006/main">
               <a:ext uri="{FF2B5EF4-FFF2-40B4-BE49-F238E27FC236}">
-                <a16:creationId xmlns:a16="http://schemas.microsoft.com/office/drawing/2014/main" id="{27CADF2E-A4BA-4AE8-A121-F69059BC99E9}"/>
+                <a16:creationId xmlns:a16="http://schemas.microsoft.com/office/drawing/2014/main" id="{955E9174-32FC-4D05-B612-C93BB5410023}"/>
               </a:ext>
             </a:extLst>
           </p:cNvPr>
@@ -2797,7 +2797,7 @@
           <p:cNvPr id="5" name="slide-subtitle">
             <a:extLst xmlns:a="http://schemas.openxmlformats.org/drawingml/2006/main">
               <a:ext uri="{FF2B5EF4-FFF2-40B4-BE49-F238E27FC236}">
-                <a16:creationId xmlns:a16="http://schemas.microsoft.com/office/drawing/2014/main" id="{17842B95-0830-4F12-8CFC-50F8D3959739}"/>
+                <a16:creationId xmlns:a16="http://schemas.microsoft.com/office/drawing/2014/main" id="{E7D9BCF9-7599-4B0A-9D91-3E37A26CABA5}"/>
               </a:ext>
             </a:extLst>
           </p:cNvPr>
@@ -2847,7 +2847,7 @@
           <p:cNvPr id="6" name="bullet-1">
             <a:extLst xmlns:a="http://schemas.openxmlformats.org/drawingml/2006/main">
               <a:ext uri="{FF2B5EF4-FFF2-40B4-BE49-F238E27FC236}">
-                <a16:creationId xmlns:a16="http://schemas.microsoft.com/office/drawing/2014/main" id="{FA331A9C-D5E9-4791-9EFE-B6F8D45EF66F}"/>
+                <a16:creationId xmlns:a16="http://schemas.microsoft.com/office/drawing/2014/main" id="{DEA14263-7581-4522-AC60-8C8A113A7BB6}"/>
               </a:ext>
             </a:extLst>
           </p:cNvPr>
@@ -2878,7 +2878,7 @@
           <p:cNvPr id="7" name="bullet-number-1">
             <a:extLst xmlns:a="http://schemas.openxmlformats.org/drawingml/2006/main">
               <a:ext uri="{FF2B5EF4-FFF2-40B4-BE49-F238E27FC236}">
-                <a16:creationId xmlns:a16="http://schemas.microsoft.com/office/drawing/2014/main" id="{EDD19E23-5A19-4358-A379-53F176A5AE0A}"/>
+                <a16:creationId xmlns:a16="http://schemas.microsoft.com/office/drawing/2014/main" id="{4616FA2E-9042-4ACB-9143-D83BC369A889}"/>
               </a:ext>
             </a:extLst>
           </p:cNvPr>
@@ -2928,7 +2928,7 @@
           <p:cNvPr id="8" name="bullet-copy-1">
             <a:extLst xmlns:a="http://schemas.openxmlformats.org/drawingml/2006/main">
               <a:ext uri="{FF2B5EF4-FFF2-40B4-BE49-F238E27FC236}">
-                <a16:creationId xmlns:a16="http://schemas.microsoft.com/office/drawing/2014/main" id="{23115E38-5BAD-4D93-93C4-FABAC013B1FE}"/>
+                <a16:creationId xmlns:a16="http://schemas.microsoft.com/office/drawing/2014/main" id="{C13E685B-105B-4D46-890F-12FD1E4C2D61}"/>
               </a:ext>
             </a:extLst>
           </p:cNvPr>
@@ -2978,7 +2978,7 @@
           <p:cNvPr id="9" name="bullet-2">
             <a:extLst xmlns:a="http://schemas.openxmlformats.org/drawingml/2006/main">
               <a:ext uri="{FF2B5EF4-FFF2-40B4-BE49-F238E27FC236}">
-                <a16:creationId xmlns:a16="http://schemas.microsoft.com/office/drawing/2014/main" id="{8A298C1B-0D2F-4FB9-B28C-3AAD04F7EE15}"/>
+                <a16:creationId xmlns:a16="http://schemas.microsoft.com/office/drawing/2014/main" id="{8B0E31ED-F386-4CC6-8B4E-BA15582AC09E}"/>
               </a:ext>
             </a:extLst>
           </p:cNvPr>
@@ -3009,7 +3009,7 @@
           <p:cNvPr id="10" name="bullet-number-2">
             <a:extLst xmlns:a="http://schemas.openxmlformats.org/drawingml/2006/main">
               <a:ext uri="{FF2B5EF4-FFF2-40B4-BE49-F238E27FC236}">
-                <a16:creationId xmlns:a16="http://schemas.microsoft.com/office/drawing/2014/main" id="{9AC01D68-F45F-4449-BC65-E5274FA9DCA8}"/>
+                <a16:creationId xmlns:a16="http://schemas.microsoft.com/office/drawing/2014/main" id="{ED1643FF-5F90-4F4C-B6D0-4BA267BC1182}"/>
               </a:ext>
             </a:extLst>
           </p:cNvPr>
@@ -3059,7 +3059,7 @@
           <p:cNvPr id="11" name="bullet-copy-2">
             <a:extLst xmlns:a="http://schemas.openxmlformats.org/drawingml/2006/main">
               <a:ext uri="{FF2B5EF4-FFF2-40B4-BE49-F238E27FC236}">
-                <a16:creationId xmlns:a16="http://schemas.microsoft.com/office/drawing/2014/main" id="{6617C77F-94B1-40C9-984F-0F24524A25CA}"/>
+                <a16:creationId xmlns:a16="http://schemas.microsoft.com/office/drawing/2014/main" id="{AACAACFC-ED9E-4E4D-AAE9-F63B360977F9}"/>
               </a:ext>
             </a:extLst>
           </p:cNvPr>
@@ -3099,7 +3099,7 @@
                   <a:srgbClr val="16343A"/>
                 </a:solidFill>
               </a:rPr>
-              <a:t>A carry test can examine comfort and closure; a capacity test can check whether the intended lunch items fit; inspection can judge stitching, finish and decoration.</a:t>
+              <a:t>A fair test controls what can be controlled and records what actually happened.</a:t>
             </a:r>
           </a:p>
         </p:txBody>
@@ -3109,7 +3109,7 @@
           <p:cNvPr id="12" name="bullet-3">
             <a:extLst xmlns:a="http://schemas.openxmlformats.org/drawingml/2006/main">
               <a:ext uri="{FF2B5EF4-FFF2-40B4-BE49-F238E27FC236}">
-                <a16:creationId xmlns:a16="http://schemas.microsoft.com/office/drawing/2014/main" id="{70118426-38F2-48C1-830C-3AD5F4D529D0}"/>
+                <a16:creationId xmlns:a16="http://schemas.microsoft.com/office/drawing/2014/main" id="{B7282586-E64C-494B-B7B4-708169365C15}"/>
               </a:ext>
             </a:extLst>
           </p:cNvPr>
@@ -3140,7 +3140,7 @@
           <p:cNvPr id="13" name="bullet-number-3">
             <a:extLst xmlns:a="http://schemas.openxmlformats.org/drawingml/2006/main">
               <a:ext uri="{FF2B5EF4-FFF2-40B4-BE49-F238E27FC236}">
-                <a16:creationId xmlns:a16="http://schemas.microsoft.com/office/drawing/2014/main" id="{6D6287D6-DDF0-4898-957E-FD817397E305}"/>
+                <a16:creationId xmlns:a16="http://schemas.microsoft.com/office/drawing/2014/main" id="{5F75EB8B-9659-4CCC-B63E-A0D9B9257F8D}"/>
               </a:ext>
             </a:extLst>
           </p:cNvPr>
@@ -3190,7 +3190,7 @@
           <p:cNvPr id="14" name="bullet-copy-3">
             <a:extLst xmlns:a="http://schemas.openxmlformats.org/drawingml/2006/main">
               <a:ext uri="{FF2B5EF4-FFF2-40B4-BE49-F238E27FC236}">
-                <a16:creationId xmlns:a16="http://schemas.microsoft.com/office/drawing/2014/main" id="{2C2B2FDB-8E4C-435B-A297-134288548376}"/>
+                <a16:creationId xmlns:a16="http://schemas.microsoft.com/office/drawing/2014/main" id="{FB7B3B7D-3C42-44C5-AC2E-F051C235D372}"/>
               </a:ext>
             </a:extLst>
           </p:cNvPr>
@@ -3230,7 +3230,7 @@
                   <a:srgbClr val="16343A"/>
                 </a:solidFill>
               </a:rPr>
-              <a:t>Care testing must follow the approved material instructions.</a:t>
+              <a:t>This makes it harder to change the test simply because the product performed differently from the prediction.</a:t>
             </a:r>
           </a:p>
         </p:txBody>
@@ -3238,7 +3238,7 @@
     </p:spTree>
     <p:extLst>
       <p:ext uri="{BB962C8B-B14F-4D97-AF65-F5344CB8AC3E}">
-        <p14:creationId xmlns:p14="http://schemas.microsoft.com/office/powerpoint/2010/main" val="16311337"/>
+        <p14:creationId xmlns:p14="http://schemas.microsoft.com/office/powerpoint/2010/main" val="288334110"/>
       </p:ext>
     </p:extLst>
   </p:cSld>
@@ -3269,7 +3269,7 @@
           <p:cNvPr id="12" name="top-rule">
             <a:extLst xmlns:a="http://schemas.openxmlformats.org/drawingml/2006/main">
               <a:ext uri="{FF2B5EF4-FFF2-40B4-BE49-F238E27FC236}">
-                <a16:creationId xmlns:a16="http://schemas.microsoft.com/office/drawing/2014/main" id="{A5F209F9-9B77-4190-A679-32069E8C1E8F}"/>
+                <a16:creationId xmlns:a16="http://schemas.microsoft.com/office/drawing/2014/main" id="{0BD090FD-933C-408C-B608-C9A38400178C}"/>
               </a:ext>
             </a:extLst>
           </p:cNvPr>
@@ -3300,7 +3300,7 @@
           <p:cNvPr id="2" name="course-label">
             <a:extLst xmlns:a="http://schemas.openxmlformats.org/drawingml/2006/main">
               <a:ext uri="{FF2B5EF4-FFF2-40B4-BE49-F238E27FC236}">
-                <a16:creationId xmlns:a16="http://schemas.microsoft.com/office/drawing/2014/main" id="{B739D32A-1893-4CB8-8625-B14155DCD0A3}"/>
+                <a16:creationId xmlns:a16="http://schemas.microsoft.com/office/drawing/2014/main" id="{5E3387E0-D188-4894-8506-0FA60463994A}"/>
               </a:ext>
             </a:extLst>
           </p:cNvPr>
@@ -3350,7 +3350,7 @@
           <p:cNvPr id="3" name="module-label">
             <a:extLst xmlns:a="http://schemas.openxmlformats.org/drawingml/2006/main">
               <a:ext uri="{FF2B5EF4-FFF2-40B4-BE49-F238E27FC236}">
-                <a16:creationId xmlns:a16="http://schemas.microsoft.com/office/drawing/2014/main" id="{BDC3A512-4F7E-450B-8701-C0E7463C635E}"/>
+                <a16:creationId xmlns:a16="http://schemas.microsoft.com/office/drawing/2014/main" id="{258C6430-2B85-48B0-ADEB-5668FD172AEE}"/>
               </a:ext>
             </a:extLst>
           </p:cNvPr>
@@ -3400,7 +3400,7 @@
           <p:cNvPr id="4" name="slide-title">
             <a:extLst xmlns:a="http://schemas.openxmlformats.org/drawingml/2006/main">
               <a:ext uri="{FF2B5EF4-FFF2-40B4-BE49-F238E27FC236}">
-                <a16:creationId xmlns:a16="http://schemas.microsoft.com/office/drawing/2014/main" id="{201B972B-7058-4D9B-91D4-108E2A5A0F56}"/>
+                <a16:creationId xmlns:a16="http://schemas.microsoft.com/office/drawing/2014/main" id="{4290C791-2FF6-43DE-A27F-CBB63584B6E6}"/>
               </a:ext>
             </a:extLst>
           </p:cNvPr>
@@ -3450,7 +3450,7 @@
           <p:cNvPr id="5" name="slide-subtitle">
             <a:extLst xmlns:a="http://schemas.openxmlformats.org/drawingml/2006/main">
               <a:ext uri="{FF2B5EF4-FFF2-40B4-BE49-F238E27FC236}">
-                <a16:creationId xmlns:a16="http://schemas.microsoft.com/office/drawing/2014/main" id="{861C0A91-2254-4643-8EB3-336D000CAAD9}"/>
+                <a16:creationId xmlns:a16="http://schemas.microsoft.com/office/drawing/2014/main" id="{02E9945D-E277-48D9-8F2E-7164072D8E27}"/>
               </a:ext>
             </a:extLst>
           </p:cNvPr>
@@ -3500,7 +3500,7 @@
           <p:cNvPr id="6" name="prompt-accent">
             <a:extLst xmlns:a="http://schemas.openxmlformats.org/drawingml/2006/main">
               <a:ext uri="{FF2B5EF4-FFF2-40B4-BE49-F238E27FC236}">
-                <a16:creationId xmlns:a16="http://schemas.microsoft.com/office/drawing/2014/main" id="{23A953F7-F846-42CC-9E1F-C7C4681FFD17}"/>
+                <a16:creationId xmlns:a16="http://schemas.microsoft.com/office/drawing/2014/main" id="{5A4BB419-0527-4FF2-BF68-E3B4451D0494}"/>
               </a:ext>
             </a:extLst>
           </p:cNvPr>
@@ -3531,7 +3531,7 @@
           <p:cNvPr id="7" name="plain-language">
             <a:extLst xmlns:a="http://schemas.openxmlformats.org/drawingml/2006/main">
               <a:ext uri="{FF2B5EF4-FFF2-40B4-BE49-F238E27FC236}">
-                <a16:creationId xmlns:a16="http://schemas.microsoft.com/office/drawing/2014/main" id="{8E8DC741-B1C3-4757-9041-0CC665B3D2C0}"/>
+                <a16:creationId xmlns:a16="http://schemas.microsoft.com/office/drawing/2014/main" id="{49567BE1-DA3D-4A98-9F2E-286D03C84E9E}"/>
               </a:ext>
             </a:extLst>
           </p:cNvPr>
@@ -3581,7 +3581,7 @@
           <p:cNvPr id="8" name="clarify">
             <a:extLst xmlns:a="http://schemas.openxmlformats.org/drawingml/2006/main">
               <a:ext uri="{FF2B5EF4-FFF2-40B4-BE49-F238E27FC236}">
-                <a16:creationId xmlns:a16="http://schemas.microsoft.com/office/drawing/2014/main" id="{A104D194-1D0B-4924-9688-1AC285F366F5}"/>
+                <a16:creationId xmlns:a16="http://schemas.microsoft.com/office/drawing/2014/main" id="{648D0E54-0FE0-4837-A8D1-7EE870DAC4AA}"/>
               </a:ext>
             </a:extLst>
           </p:cNvPr>
@@ -3631,7 +3631,7 @@
           <p:cNvPr id="9" name="starter-label">
             <a:extLst xmlns:a="http://schemas.openxmlformats.org/drawingml/2006/main">
               <a:ext uri="{FF2B5EF4-FFF2-40B4-BE49-F238E27FC236}">
-                <a16:creationId xmlns:a16="http://schemas.microsoft.com/office/drawing/2014/main" id="{69849710-393E-479D-8B51-93CFAAD6D454}"/>
+                <a16:creationId xmlns:a16="http://schemas.microsoft.com/office/drawing/2014/main" id="{70ABB2A8-3616-4486-9289-4B4C925C96FB}"/>
               </a:ext>
             </a:extLst>
           </p:cNvPr>
@@ -3681,7 +3681,7 @@
           <p:cNvPr id="10" name="starter">
             <a:extLst xmlns:a="http://schemas.openxmlformats.org/drawingml/2006/main">
               <a:ext uri="{FF2B5EF4-FFF2-40B4-BE49-F238E27FC236}">
-                <a16:creationId xmlns:a16="http://schemas.microsoft.com/office/drawing/2014/main" id="{92141C45-7BB6-4823-87C8-6D602FC3B506}"/>
+                <a16:creationId xmlns:a16="http://schemas.microsoft.com/office/drawing/2014/main" id="{492E373D-D1FC-4830-9143-321CFDB4AF43}"/>
               </a:ext>
             </a:extLst>
           </p:cNvPr>
@@ -3731,7 +3731,7 @@
           <p:cNvPr id="11" name="action">
             <a:extLst xmlns:a="http://schemas.openxmlformats.org/drawingml/2006/main">
               <a:ext uri="{FF2B5EF4-FFF2-40B4-BE49-F238E27FC236}">
-                <a16:creationId xmlns:a16="http://schemas.microsoft.com/office/drawing/2014/main" id="{14F3E70F-2BFB-4092-8094-6CF1B96F498D}"/>
+                <a16:creationId xmlns:a16="http://schemas.microsoft.com/office/drawing/2014/main" id="{E1B41CDB-B1D0-4E30-A95E-8F417D870A77}"/>
               </a:ext>
             </a:extLst>
           </p:cNvPr>
@@ -3779,7 +3779,7 @@
     </p:spTree>
     <p:extLst>
       <p:ext uri="{BB962C8B-B14F-4D97-AF65-F5344CB8AC3E}">
-        <p14:creationId xmlns:p14="http://schemas.microsoft.com/office/powerpoint/2010/main" val="1547544049"/>
+        <p14:creationId xmlns:p14="http://schemas.microsoft.com/office/powerpoint/2010/main" val="1379695546"/>
       </p:ext>
     </p:extLst>
   </p:cSld>
@@ -3810,7 +3810,7 @@
           <p:cNvPr id="15" name="top-rule">
             <a:extLst xmlns:a="http://schemas.openxmlformats.org/drawingml/2006/main">
               <a:ext uri="{FF2B5EF4-FFF2-40B4-BE49-F238E27FC236}">
-                <a16:creationId xmlns:a16="http://schemas.microsoft.com/office/drawing/2014/main" id="{D1F2C89E-4F5E-4A91-A8F0-04C8783553D7}"/>
+                <a16:creationId xmlns:a16="http://schemas.microsoft.com/office/drawing/2014/main" id="{88AE1606-1209-4357-9D67-6F9E114B5974}"/>
               </a:ext>
             </a:extLst>
           </p:cNvPr>
@@ -3841,7 +3841,7 @@
           <p:cNvPr id="2" name="course-label">
             <a:extLst xmlns:a="http://schemas.openxmlformats.org/drawingml/2006/main">
               <a:ext uri="{FF2B5EF4-FFF2-40B4-BE49-F238E27FC236}">
-                <a16:creationId xmlns:a16="http://schemas.microsoft.com/office/drawing/2014/main" id="{53CC3459-A9E0-4FC7-89E4-A5087AC7F873}"/>
+                <a16:creationId xmlns:a16="http://schemas.microsoft.com/office/drawing/2014/main" id="{4F655B9D-F7EE-4F53-B357-45EC61BEF844}"/>
               </a:ext>
             </a:extLst>
           </p:cNvPr>
@@ -3891,7 +3891,7 @@
           <p:cNvPr id="3" name="module-label">
             <a:extLst xmlns:a="http://schemas.openxmlformats.org/drawingml/2006/main">
               <a:ext uri="{FF2B5EF4-FFF2-40B4-BE49-F238E27FC236}">
-                <a16:creationId xmlns:a16="http://schemas.microsoft.com/office/drawing/2014/main" id="{498314F0-AAF5-4870-AAF5-723A7EE5F28E}"/>
+                <a16:creationId xmlns:a16="http://schemas.microsoft.com/office/drawing/2014/main" id="{759192AD-02CC-4AC8-957B-91F091F2FB87}"/>
               </a:ext>
             </a:extLst>
           </p:cNvPr>
@@ -3941,7 +3941,7 @@
           <p:cNvPr id="4" name="slide-title">
             <a:extLst xmlns:a="http://schemas.openxmlformats.org/drawingml/2006/main">
               <a:ext uri="{FF2B5EF4-FFF2-40B4-BE49-F238E27FC236}">
-                <a16:creationId xmlns:a16="http://schemas.microsoft.com/office/drawing/2014/main" id="{907A1955-F96E-45BB-8AF4-37AAF0F057A5}"/>
+                <a16:creationId xmlns:a16="http://schemas.microsoft.com/office/drawing/2014/main" id="{A2312F33-F537-4482-86F0-70C3664FDD20}"/>
               </a:ext>
             </a:extLst>
           </p:cNvPr>
@@ -3991,7 +3991,7 @@
           <p:cNvPr id="5" name="slide-subtitle">
             <a:extLst xmlns:a="http://schemas.openxmlformats.org/drawingml/2006/main">
               <a:ext uri="{FF2B5EF4-FFF2-40B4-BE49-F238E27FC236}">
-                <a16:creationId xmlns:a16="http://schemas.microsoft.com/office/drawing/2014/main" id="{D17F6CE3-2577-457D-AF6D-E0D6311D2132}"/>
+                <a16:creationId xmlns:a16="http://schemas.microsoft.com/office/drawing/2014/main" id="{15738314-CA6D-4323-A0E7-5CC358ADEE18}"/>
               </a:ext>
             </a:extLst>
           </p:cNvPr>
@@ -4041,7 +4041,7 @@
           <p:cNvPr id="6" name="bullet-1">
             <a:extLst xmlns:a="http://schemas.openxmlformats.org/drawingml/2006/main">
               <a:ext uri="{FF2B5EF4-FFF2-40B4-BE49-F238E27FC236}">
-                <a16:creationId xmlns:a16="http://schemas.microsoft.com/office/drawing/2014/main" id="{C17D7C63-F51C-43F7-B7AE-79988B24FBC7}"/>
+                <a16:creationId xmlns:a16="http://schemas.microsoft.com/office/drawing/2014/main" id="{EA6E7BA0-53EB-4556-B4EC-B8C01E3F113A}"/>
               </a:ext>
             </a:extLst>
           </p:cNvPr>
@@ -4072,7 +4072,7 @@
           <p:cNvPr id="7" name="bullet-number-1">
             <a:extLst xmlns:a="http://schemas.openxmlformats.org/drawingml/2006/main">
               <a:ext uri="{FF2B5EF4-FFF2-40B4-BE49-F238E27FC236}">
-                <a16:creationId xmlns:a16="http://schemas.microsoft.com/office/drawing/2014/main" id="{0690F78E-F848-4E1B-A834-21D5E4F6D2A9}"/>
+                <a16:creationId xmlns:a16="http://schemas.microsoft.com/office/drawing/2014/main" id="{BFD0B5A9-8E4D-4EB0-A63E-91BBE9713DED}"/>
               </a:ext>
             </a:extLst>
           </p:cNvPr>
@@ -4122,7 +4122,7 @@
           <p:cNvPr id="8" name="bullet-copy-1">
             <a:extLst xmlns:a="http://schemas.openxmlformats.org/drawingml/2006/main">
               <a:ext uri="{FF2B5EF4-FFF2-40B4-BE49-F238E27FC236}">
-                <a16:creationId xmlns:a16="http://schemas.microsoft.com/office/drawing/2014/main" id="{D3D2B92A-C7ED-4A6C-8746-2F18833B08C9}"/>
+                <a16:creationId xmlns:a16="http://schemas.microsoft.com/office/drawing/2014/main" id="{79811EF6-EE5E-4666-994D-A0DCA9741DEB}"/>
               </a:ext>
             </a:extLst>
           </p:cNvPr>
@@ -4172,7 +4172,7 @@
           <p:cNvPr id="9" name="bullet-2">
             <a:extLst xmlns:a="http://schemas.openxmlformats.org/drawingml/2006/main">
               <a:ext uri="{FF2B5EF4-FFF2-40B4-BE49-F238E27FC236}">
-                <a16:creationId xmlns:a16="http://schemas.microsoft.com/office/drawing/2014/main" id="{7954AF50-0F20-4841-BEAC-D0C3D5754625}"/>
+                <a16:creationId xmlns:a16="http://schemas.microsoft.com/office/drawing/2014/main" id="{4704D391-2181-43A5-8ABF-BA7923AD0A31}"/>
               </a:ext>
             </a:extLst>
           </p:cNvPr>
@@ -4203,7 +4203,7 @@
           <p:cNvPr id="10" name="bullet-number-2">
             <a:extLst xmlns:a="http://schemas.openxmlformats.org/drawingml/2006/main">
               <a:ext uri="{FF2B5EF4-FFF2-40B4-BE49-F238E27FC236}">
-                <a16:creationId xmlns:a16="http://schemas.microsoft.com/office/drawing/2014/main" id="{4CD5291E-EA85-4ACE-9EDD-20430191BD94}"/>
+                <a16:creationId xmlns:a16="http://schemas.microsoft.com/office/drawing/2014/main" id="{37E2FD8B-E21A-42C9-8070-783AD332D73E}"/>
               </a:ext>
             </a:extLst>
           </p:cNvPr>
@@ -4253,7 +4253,7 @@
           <p:cNvPr id="11" name="bullet-copy-2">
             <a:extLst xmlns:a="http://schemas.openxmlformats.org/drawingml/2006/main">
               <a:ext uri="{FF2B5EF4-FFF2-40B4-BE49-F238E27FC236}">
-                <a16:creationId xmlns:a16="http://schemas.microsoft.com/office/drawing/2014/main" id="{BB42EF56-E83B-4416-9B55-4ED8734F19EF}"/>
+                <a16:creationId xmlns:a16="http://schemas.microsoft.com/office/drawing/2014/main" id="{EEFD4646-D547-4151-9B98-2F6AB1CE610F}"/>
               </a:ext>
             </a:extLst>
           </p:cNvPr>
@@ -4293,7 +4293,7 @@
                   <a:srgbClr val="16343A"/>
                 </a:solidFill>
               </a:rPr>
-              <a:t>“The closure stayed shut during three short carry trials, so the bag met my security criterion” is stronger than “it worked well”.</a:t>
+              <a:t>A successful feature can still be refined.</a:t>
             </a:r>
           </a:p>
         </p:txBody>
@@ -4303,7 +4303,7 @@
           <p:cNvPr id="12" name="bullet-3">
             <a:extLst xmlns:a="http://schemas.openxmlformats.org/drawingml/2006/main">
               <a:ext uri="{FF2B5EF4-FFF2-40B4-BE49-F238E27FC236}">
-                <a16:creationId xmlns:a16="http://schemas.microsoft.com/office/drawing/2014/main" id="{F34EAB9D-97F5-41EF-B26B-E069F72BA4CE}"/>
+                <a16:creationId xmlns:a16="http://schemas.microsoft.com/office/drawing/2014/main" id="{8EDA9183-0220-422F-9D93-B83ACF2BD484}"/>
               </a:ext>
             </a:extLst>
           </p:cNvPr>
@@ -4334,7 +4334,7 @@
           <p:cNvPr id="13" name="bullet-number-3">
             <a:extLst xmlns:a="http://schemas.openxmlformats.org/drawingml/2006/main">
               <a:ext uri="{FF2B5EF4-FFF2-40B4-BE49-F238E27FC236}">
-                <a16:creationId xmlns:a16="http://schemas.microsoft.com/office/drawing/2014/main" id="{DC6E6338-E934-4768-9890-56DE53AB3C35}"/>
+                <a16:creationId xmlns:a16="http://schemas.microsoft.com/office/drawing/2014/main" id="{4FE59C37-C0AD-45F4-87DA-71455F66EA13}"/>
               </a:ext>
             </a:extLst>
           </p:cNvPr>
@@ -4384,7 +4384,7 @@
           <p:cNvPr id="14" name="bullet-copy-3">
             <a:extLst xmlns:a="http://schemas.openxmlformats.org/drawingml/2006/main">
               <a:ext uri="{FF2B5EF4-FFF2-40B4-BE49-F238E27FC236}">
-                <a16:creationId xmlns:a16="http://schemas.microsoft.com/office/drawing/2014/main" id="{7F5C2AC9-0C69-4C11-9D77-E750DA957AC9}"/>
+                <a16:creationId xmlns:a16="http://schemas.microsoft.com/office/drawing/2014/main" id="{C54BED87-2AD9-43C9-B129-47CA5DE7949F}"/>
               </a:ext>
             </a:extLst>
           </p:cNvPr>
@@ -4424,7 +4424,7 @@
                   <a:srgbClr val="16343A"/>
                 </a:solidFill>
               </a:rPr>
-              <a:t>Discuss strengths and limitations.</a:t>
+              <a:t>Include limitations because they reveal where the evidence is incomplete or where performance is mixed.</a:t>
             </a:r>
           </a:p>
         </p:txBody>
@@ -4432,7 +4432,7 @@
     </p:spTree>
     <p:extLst>
       <p:ext uri="{BB962C8B-B14F-4D97-AF65-F5344CB8AC3E}">
-        <p14:creationId xmlns:p14="http://schemas.microsoft.com/office/powerpoint/2010/main" val="1516741132"/>
+        <p14:creationId xmlns:p14="http://schemas.microsoft.com/office/powerpoint/2010/main" val="2065289071"/>
       </p:ext>
     </p:extLst>
   </p:cSld>
@@ -4463,7 +4463,7 @@
           <p:cNvPr id="12" name="top-rule">
             <a:extLst xmlns:a="http://schemas.openxmlformats.org/drawingml/2006/main">
               <a:ext uri="{FF2B5EF4-FFF2-40B4-BE49-F238E27FC236}">
-                <a16:creationId xmlns:a16="http://schemas.microsoft.com/office/drawing/2014/main" id="{34F16D6B-F61E-469D-9F1B-E847FC258889}"/>
+                <a16:creationId xmlns:a16="http://schemas.microsoft.com/office/drawing/2014/main" id="{554AEB4C-0B3D-4904-9D02-40931F065152}"/>
               </a:ext>
             </a:extLst>
           </p:cNvPr>
@@ -4494,7 +4494,7 @@
           <p:cNvPr id="2" name="course-label">
             <a:extLst xmlns:a="http://schemas.openxmlformats.org/drawingml/2006/main">
               <a:ext uri="{FF2B5EF4-FFF2-40B4-BE49-F238E27FC236}">
-                <a16:creationId xmlns:a16="http://schemas.microsoft.com/office/drawing/2014/main" id="{B854B6BF-54CA-4B28-A1C5-926A29C863BF}"/>
+                <a16:creationId xmlns:a16="http://schemas.microsoft.com/office/drawing/2014/main" id="{37BE4F09-C6B0-4B30-B313-68A22B4B39FD}"/>
               </a:ext>
             </a:extLst>
           </p:cNvPr>
@@ -4544,7 +4544,7 @@
           <p:cNvPr id="3" name="module-label">
             <a:extLst xmlns:a="http://schemas.openxmlformats.org/drawingml/2006/main">
               <a:ext uri="{FF2B5EF4-FFF2-40B4-BE49-F238E27FC236}">
-                <a16:creationId xmlns:a16="http://schemas.microsoft.com/office/drawing/2014/main" id="{DF1293BE-DC5B-40E1-B0F9-47B5574084FF}"/>
+                <a16:creationId xmlns:a16="http://schemas.microsoft.com/office/drawing/2014/main" id="{F984B58A-0F67-40D2-AEA6-A033403F5FFD}"/>
               </a:ext>
             </a:extLst>
           </p:cNvPr>
@@ -4594,7 +4594,7 @@
           <p:cNvPr id="4" name="slide-title">
             <a:extLst xmlns:a="http://schemas.openxmlformats.org/drawingml/2006/main">
               <a:ext uri="{FF2B5EF4-FFF2-40B4-BE49-F238E27FC236}">
-                <a16:creationId xmlns:a16="http://schemas.microsoft.com/office/drawing/2014/main" id="{EF446E63-876B-4574-8DAA-92AA3A629D6B}"/>
+                <a16:creationId xmlns:a16="http://schemas.microsoft.com/office/drawing/2014/main" id="{799AFD72-C9C1-4AB1-9263-C32FC0402644}"/>
               </a:ext>
             </a:extLst>
           </p:cNvPr>
@@ -4644,7 +4644,7 @@
           <p:cNvPr id="5" name="slide-subtitle">
             <a:extLst xmlns:a="http://schemas.openxmlformats.org/drawingml/2006/main">
               <a:ext uri="{FF2B5EF4-FFF2-40B4-BE49-F238E27FC236}">
-                <a16:creationId xmlns:a16="http://schemas.microsoft.com/office/drawing/2014/main" id="{278BD09B-B4BE-4C87-9ED0-2C9F0AD95645}"/>
+                <a16:creationId xmlns:a16="http://schemas.microsoft.com/office/drawing/2014/main" id="{010A5838-E2FB-476D-B1CB-DFFC44617C13}"/>
               </a:ext>
             </a:extLst>
           </p:cNvPr>
@@ -4694,7 +4694,7 @@
           <p:cNvPr id="6" name="prompt-accent">
             <a:extLst xmlns:a="http://schemas.openxmlformats.org/drawingml/2006/main">
               <a:ext uri="{FF2B5EF4-FFF2-40B4-BE49-F238E27FC236}">
-                <a16:creationId xmlns:a16="http://schemas.microsoft.com/office/drawing/2014/main" id="{8CE18568-29B4-4791-99F0-076D66377EEE}"/>
+                <a16:creationId xmlns:a16="http://schemas.microsoft.com/office/drawing/2014/main" id="{A45CA832-0EA5-4B57-BBB3-12EE8C33752B}"/>
               </a:ext>
             </a:extLst>
           </p:cNvPr>
@@ -4725,7 +4725,7 @@
           <p:cNvPr id="7" name="plain-language">
             <a:extLst xmlns:a="http://schemas.openxmlformats.org/drawingml/2006/main">
               <a:ext uri="{FF2B5EF4-FFF2-40B4-BE49-F238E27FC236}">
-                <a16:creationId xmlns:a16="http://schemas.microsoft.com/office/drawing/2014/main" id="{562999EF-B921-4C51-81E6-A708EFB4D8A0}"/>
+                <a16:creationId xmlns:a16="http://schemas.microsoft.com/office/drawing/2014/main" id="{A3BFACDB-B889-418C-B363-362E222ECA8C}"/>
               </a:ext>
             </a:extLst>
           </p:cNvPr>
@@ -4775,7 +4775,7 @@
           <p:cNvPr id="8" name="clarify">
             <a:extLst xmlns:a="http://schemas.openxmlformats.org/drawingml/2006/main">
               <a:ext uri="{FF2B5EF4-FFF2-40B4-BE49-F238E27FC236}">
-                <a16:creationId xmlns:a16="http://schemas.microsoft.com/office/drawing/2014/main" id="{32588B2C-62E4-4830-9543-08A45FA4E4BD}"/>
+                <a16:creationId xmlns:a16="http://schemas.microsoft.com/office/drawing/2014/main" id="{CB4D9ADE-8691-47B8-8D08-1F3A41ABBF6B}"/>
               </a:ext>
             </a:extLst>
           </p:cNvPr>
@@ -4825,7 +4825,7 @@
           <p:cNvPr id="9" name="starter-label">
             <a:extLst xmlns:a="http://schemas.openxmlformats.org/drawingml/2006/main">
               <a:ext uri="{FF2B5EF4-FFF2-40B4-BE49-F238E27FC236}">
-                <a16:creationId xmlns:a16="http://schemas.microsoft.com/office/drawing/2014/main" id="{A5C42590-51B2-4F13-B66D-D5EFABF3BCDA}"/>
+                <a16:creationId xmlns:a16="http://schemas.microsoft.com/office/drawing/2014/main" id="{1AD1776C-13E8-4AA4-9EB8-ED1A634F19FA}"/>
               </a:ext>
             </a:extLst>
           </p:cNvPr>
@@ -4875,7 +4875,7 @@
           <p:cNvPr id="10" name="starter">
             <a:extLst xmlns:a="http://schemas.openxmlformats.org/drawingml/2006/main">
               <a:ext uri="{FF2B5EF4-FFF2-40B4-BE49-F238E27FC236}">
-                <a16:creationId xmlns:a16="http://schemas.microsoft.com/office/drawing/2014/main" id="{5041A2F9-B04D-4D7A-A2A0-4938CB4EBC89}"/>
+                <a16:creationId xmlns:a16="http://schemas.microsoft.com/office/drawing/2014/main" id="{A6E31A18-AD14-4710-8265-315704E48899}"/>
               </a:ext>
             </a:extLst>
           </p:cNvPr>
@@ -4925,7 +4925,7 @@
           <p:cNvPr id="11" name="action">
             <a:extLst xmlns:a="http://schemas.openxmlformats.org/drawingml/2006/main">
               <a:ext uri="{FF2B5EF4-FFF2-40B4-BE49-F238E27FC236}">
-                <a16:creationId xmlns:a16="http://schemas.microsoft.com/office/drawing/2014/main" id="{0F66FA1D-5F15-437E-8022-C3C21B88753E}"/>
+                <a16:creationId xmlns:a16="http://schemas.microsoft.com/office/drawing/2014/main" id="{61841285-BD1A-43AC-B73F-825116C63C34}"/>
               </a:ext>
             </a:extLst>
           </p:cNvPr>
@@ -4973,7 +4973,7 @@
     </p:spTree>
     <p:extLst>
       <p:ext uri="{BB962C8B-B14F-4D97-AF65-F5344CB8AC3E}">
-        <p14:creationId xmlns:p14="http://schemas.microsoft.com/office/powerpoint/2010/main" val="525646641"/>
+        <p14:creationId xmlns:p14="http://schemas.microsoft.com/office/powerpoint/2010/main" val="1318510542"/>
       </p:ext>
     </p:extLst>
   </p:cSld>
@@ -5004,7 +5004,7 @@
           <p:cNvPr id="15" name="top-rule">
             <a:extLst xmlns:a="http://schemas.openxmlformats.org/drawingml/2006/main">
               <a:ext uri="{FF2B5EF4-FFF2-40B4-BE49-F238E27FC236}">
-                <a16:creationId xmlns:a16="http://schemas.microsoft.com/office/drawing/2014/main" id="{92E7CD07-850D-4DC6-B0DD-8D0C10965B1C}"/>
+                <a16:creationId xmlns:a16="http://schemas.microsoft.com/office/drawing/2014/main" id="{CCCC5C63-84DB-481E-9F2A-3CD637CA7AB7}"/>
               </a:ext>
             </a:extLst>
           </p:cNvPr>
@@ -5035,7 +5035,7 @@
           <p:cNvPr id="2" name="course-label">
             <a:extLst xmlns:a="http://schemas.openxmlformats.org/drawingml/2006/main">
               <a:ext uri="{FF2B5EF4-FFF2-40B4-BE49-F238E27FC236}">
-                <a16:creationId xmlns:a16="http://schemas.microsoft.com/office/drawing/2014/main" id="{BE3305C1-2C67-486F-A349-FB790D18D17E}"/>
+                <a16:creationId xmlns:a16="http://schemas.microsoft.com/office/drawing/2014/main" id="{BE5DB12D-9E3F-44F8-8506-2635E53E67E3}"/>
               </a:ext>
             </a:extLst>
           </p:cNvPr>
@@ -5085,7 +5085,7 @@
           <p:cNvPr id="3" name="module-label">
             <a:extLst xmlns:a="http://schemas.openxmlformats.org/drawingml/2006/main">
               <a:ext uri="{FF2B5EF4-FFF2-40B4-BE49-F238E27FC236}">
-                <a16:creationId xmlns:a16="http://schemas.microsoft.com/office/drawing/2014/main" id="{02F08302-6109-4671-92EE-F714A985465D}"/>
+                <a16:creationId xmlns:a16="http://schemas.microsoft.com/office/drawing/2014/main" id="{CA16DB3C-0ED9-4004-A07F-ECB0A006801A}"/>
               </a:ext>
             </a:extLst>
           </p:cNvPr>
@@ -5135,7 +5135,7 @@
           <p:cNvPr id="4" name="slide-title">
             <a:extLst xmlns:a="http://schemas.openxmlformats.org/drawingml/2006/main">
               <a:ext uri="{FF2B5EF4-FFF2-40B4-BE49-F238E27FC236}">
-                <a16:creationId xmlns:a16="http://schemas.microsoft.com/office/drawing/2014/main" id="{DAD17C9C-8F5D-4FAA-B32D-22370A116645}"/>
+                <a16:creationId xmlns:a16="http://schemas.microsoft.com/office/drawing/2014/main" id="{1A9FBFE5-F53C-44B1-80F5-8ABD6CB50754}"/>
               </a:ext>
             </a:extLst>
           </p:cNvPr>
@@ -5185,7 +5185,7 @@
           <p:cNvPr id="5" name="slide-subtitle">
             <a:extLst xmlns:a="http://schemas.openxmlformats.org/drawingml/2006/main">
               <a:ext uri="{FF2B5EF4-FFF2-40B4-BE49-F238E27FC236}">
-                <a16:creationId xmlns:a16="http://schemas.microsoft.com/office/drawing/2014/main" id="{5AC92FDF-EA2F-4A1D-A988-B2D12336C710}"/>
+                <a16:creationId xmlns:a16="http://schemas.microsoft.com/office/drawing/2014/main" id="{DB747CDC-81CF-4FC7-A1A5-8EF7ACBE082B}"/>
               </a:ext>
             </a:extLst>
           </p:cNvPr>
@@ -5235,7 +5235,7 @@
           <p:cNvPr id="6" name="bullet-1">
             <a:extLst xmlns:a="http://schemas.openxmlformats.org/drawingml/2006/main">
               <a:ext uri="{FF2B5EF4-FFF2-40B4-BE49-F238E27FC236}">
-                <a16:creationId xmlns:a16="http://schemas.microsoft.com/office/drawing/2014/main" id="{36FFAD39-D246-491F-9A7B-0B5EA7DA84D7}"/>
+                <a16:creationId xmlns:a16="http://schemas.microsoft.com/office/drawing/2014/main" id="{CFE5B4F0-7693-4444-AE40-43D89AA682DE}"/>
               </a:ext>
             </a:extLst>
           </p:cNvPr>
@@ -5266,7 +5266,7 @@
           <p:cNvPr id="7" name="bullet-number-1">
             <a:extLst xmlns:a="http://schemas.openxmlformats.org/drawingml/2006/main">
               <a:ext uri="{FF2B5EF4-FFF2-40B4-BE49-F238E27FC236}">
-                <a16:creationId xmlns:a16="http://schemas.microsoft.com/office/drawing/2014/main" id="{893F10B1-F22D-488A-A91A-FEB4ADC7E36D}"/>
+                <a16:creationId xmlns:a16="http://schemas.microsoft.com/office/drawing/2014/main" id="{82FD02A7-F10C-45E7-80F4-51B5E6C4DD39}"/>
               </a:ext>
             </a:extLst>
           </p:cNvPr>
@@ -5316,7 +5316,7 @@
           <p:cNvPr id="8" name="bullet-copy-1">
             <a:extLst xmlns:a="http://schemas.openxmlformats.org/drawingml/2006/main">
               <a:ext uri="{FF2B5EF4-FFF2-40B4-BE49-F238E27FC236}">
-                <a16:creationId xmlns:a16="http://schemas.microsoft.com/office/drawing/2014/main" id="{62C77721-54BA-4D4E-969A-233767543875}"/>
+                <a16:creationId xmlns:a16="http://schemas.microsoft.com/office/drawing/2014/main" id="{19DF3EFE-EEF6-4D3D-A447-9A9E24AE1BB0}"/>
               </a:ext>
             </a:extLst>
           </p:cNvPr>
@@ -5366,7 +5366,7 @@
           <p:cNvPr id="9" name="bullet-2">
             <a:extLst xmlns:a="http://schemas.openxmlformats.org/drawingml/2006/main">
               <a:ext uri="{FF2B5EF4-FFF2-40B4-BE49-F238E27FC236}">
-                <a16:creationId xmlns:a16="http://schemas.microsoft.com/office/drawing/2014/main" id="{568D5CB8-0D30-4691-AF15-4A8489B8628D}"/>
+                <a16:creationId xmlns:a16="http://schemas.microsoft.com/office/drawing/2014/main" id="{BE403B95-EC2F-4528-8352-C7C2CF77F8D0}"/>
               </a:ext>
             </a:extLst>
           </p:cNvPr>
@@ -5397,7 +5397,7 @@
           <p:cNvPr id="10" name="bullet-number-2">
             <a:extLst xmlns:a="http://schemas.openxmlformats.org/drawingml/2006/main">
               <a:ext uri="{FF2B5EF4-FFF2-40B4-BE49-F238E27FC236}">
-                <a16:creationId xmlns:a16="http://schemas.microsoft.com/office/drawing/2014/main" id="{7816629E-1536-43C8-8087-3067AC7B4015}"/>
+                <a16:creationId xmlns:a16="http://schemas.microsoft.com/office/drawing/2014/main" id="{CE8A3842-B86F-4929-A4BE-426E381783A4}"/>
               </a:ext>
             </a:extLst>
           </p:cNvPr>
@@ -5447,7 +5447,7 @@
           <p:cNvPr id="11" name="bullet-copy-2">
             <a:extLst xmlns:a="http://schemas.openxmlformats.org/drawingml/2006/main">
               <a:ext uri="{FF2B5EF4-FFF2-40B4-BE49-F238E27FC236}">
-                <a16:creationId xmlns:a16="http://schemas.microsoft.com/office/drawing/2014/main" id="{85B98E33-4CD5-44A5-9AA8-DE54B571F6D5}"/>
+                <a16:creationId xmlns:a16="http://schemas.microsoft.com/office/drawing/2014/main" id="{00153505-8E1A-445E-8F76-34567C4AF6C1}"/>
               </a:ext>
             </a:extLst>
           </p:cNvPr>
@@ -5487,7 +5487,7 @@
                   <a:srgbClr val="16343A"/>
                 </a:solidFill>
               </a:rPr>
-              <a:t>“Move the closure 10 mm after checking the teacher-approved pattern” is more actionable than “make it better”.</a:t>
+              <a:t>It may refine a feature, alter a sequence, improve a quality checkpoint or change how evidence is collected.</a:t>
             </a:r>
           </a:p>
         </p:txBody>
@@ -5497,7 +5497,7 @@
           <p:cNvPr id="12" name="bullet-3">
             <a:extLst xmlns:a="http://schemas.openxmlformats.org/drawingml/2006/main">
               <a:ext uri="{FF2B5EF4-FFF2-40B4-BE49-F238E27FC236}">
-                <a16:creationId xmlns:a16="http://schemas.microsoft.com/office/drawing/2014/main" id="{71B84B24-02A2-46FE-8BB3-8C6AC2112C7C}"/>
+                <a16:creationId xmlns:a16="http://schemas.microsoft.com/office/drawing/2014/main" id="{E0073844-E142-49CD-BB5D-3441207CB1BC}"/>
               </a:ext>
             </a:extLst>
           </p:cNvPr>
@@ -5528,7 +5528,7 @@
           <p:cNvPr id="13" name="bullet-number-3">
             <a:extLst xmlns:a="http://schemas.openxmlformats.org/drawingml/2006/main">
               <a:ext uri="{FF2B5EF4-FFF2-40B4-BE49-F238E27FC236}">
-                <a16:creationId xmlns:a16="http://schemas.microsoft.com/office/drawing/2014/main" id="{2A11B681-3EB9-4C75-9925-714D23A0E1DE}"/>
+                <a16:creationId xmlns:a16="http://schemas.microsoft.com/office/drawing/2014/main" id="{B9E38462-221C-4A0E-8F41-A097DCD97487}"/>
               </a:ext>
             </a:extLst>
           </p:cNvPr>
@@ -5578,7 +5578,7 @@
           <p:cNvPr id="14" name="bullet-copy-3">
             <a:extLst xmlns:a="http://schemas.openxmlformats.org/drawingml/2006/main">
               <a:ext uri="{FF2B5EF4-FFF2-40B4-BE49-F238E27FC236}">
-                <a16:creationId xmlns:a16="http://schemas.microsoft.com/office/drawing/2014/main" id="{765E77E9-7863-44E8-AA39-710D6308D992}"/>
+                <a16:creationId xmlns:a16="http://schemas.microsoft.com/office/drawing/2014/main" id="{D5510C20-2572-442C-9765-94EAA3A330A7}"/>
               </a:ext>
             </a:extLst>
           </p:cNvPr>
@@ -5618,7 +5618,7 @@
                   <a:srgbClr val="16343A"/>
                 </a:solidFill>
               </a:rPr>
-              <a:t>Finish by reflecting on safe practice, skill development, sustainability decisions and how evidence changed your thinking.</a:t>
+              <a:t>Use one real moment as evidence for each claim.</a:t>
             </a:r>
           </a:p>
         </p:txBody>
@@ -5626,7 +5626,7 @@
     </p:spTree>
     <p:extLst>
       <p:ext uri="{BB962C8B-B14F-4D97-AF65-F5344CB8AC3E}">
-        <p14:creationId xmlns:p14="http://schemas.microsoft.com/office/powerpoint/2010/main" val="778958550"/>
+        <p14:creationId xmlns:p14="http://schemas.microsoft.com/office/powerpoint/2010/main" val="1991827589"/>
       </p:ext>
     </p:extLst>
   </p:cSld>
@@ -5657,7 +5657,7 @@
           <p:cNvPr id="6" name="closing-rule">
             <a:extLst xmlns:a="http://schemas.openxmlformats.org/drawingml/2006/main">
               <a:ext uri="{FF2B5EF4-FFF2-40B4-BE49-F238E27FC236}">
-                <a16:creationId xmlns:a16="http://schemas.microsoft.com/office/drawing/2014/main" id="{429C2BFA-2FAF-4EC2-947C-0D1084ECE58F}"/>
+                <a16:creationId xmlns:a16="http://schemas.microsoft.com/office/drawing/2014/main" id="{17518FA5-DC35-4C19-B557-568C71C74941}"/>
               </a:ext>
             </a:extLst>
           </p:cNvPr>
@@ -5688,7 +5688,7 @@
           <p:cNvPr id="2" name="closing-kicker">
             <a:extLst xmlns:a="http://schemas.openxmlformats.org/drawingml/2006/main">
               <a:ext uri="{FF2B5EF4-FFF2-40B4-BE49-F238E27FC236}">
-                <a16:creationId xmlns:a16="http://schemas.microsoft.com/office/drawing/2014/main" id="{2B427F07-5810-41E9-B047-86EC165B163B}"/>
+                <a16:creationId xmlns:a16="http://schemas.microsoft.com/office/drawing/2014/main" id="{8BDE64A9-47D2-4316-900F-C4A5F14FBD97}"/>
               </a:ext>
             </a:extLst>
           </p:cNvPr>
@@ -5738,7 +5738,7 @@
           <p:cNvPr id="3" name="closing-title">
             <a:extLst xmlns:a="http://schemas.openxmlformats.org/drawingml/2006/main">
               <a:ext uri="{FF2B5EF4-FFF2-40B4-BE49-F238E27FC236}">
-                <a16:creationId xmlns:a16="http://schemas.microsoft.com/office/drawing/2014/main" id="{F2F031F0-AA06-4238-8FE4-97A9AF3C02D5}"/>
+                <a16:creationId xmlns:a16="http://schemas.microsoft.com/office/drawing/2014/main" id="{74416176-876C-4DB1-99F0-82F2311F7F4D}"/>
               </a:ext>
             </a:extLst>
           </p:cNvPr>
@@ -5788,7 +5788,7 @@
           <p:cNvPr id="4" name="closing-copy">
             <a:extLst xmlns:a="http://schemas.openxmlformats.org/drawingml/2006/main">
               <a:ext uri="{FF2B5EF4-FFF2-40B4-BE49-F238E27FC236}">
-                <a16:creationId xmlns:a16="http://schemas.microsoft.com/office/drawing/2014/main" id="{581B6FC4-D1ED-46A0-B5F2-6C4A1D4060CE}"/>
+                <a16:creationId xmlns:a16="http://schemas.microsoft.com/office/drawing/2014/main" id="{D5C4C3F7-B22B-452A-8210-3454C0B2AD5B}"/>
               </a:ext>
             </a:extLst>
           </p:cNvPr>
@@ -5862,7 +5862,7 @@
                   <a:srgbClr val="E6F2EF"/>
                 </a:solidFill>
               </a:rPr>
-              <a:t>3. Continue Project Activity 10 and keep authentic evidence.</a:t>
+              <a:t>3. Continue the Product test and evaluation lab and keep authentic evidence.</a:t>
             </a:r>
           </a:p>
         </p:txBody>
@@ -5872,7 +5872,7 @@
           <p:cNvPr id="5" name="closing-boundary">
             <a:extLst xmlns:a="http://schemas.openxmlformats.org/drawingml/2006/main">
               <a:ext uri="{FF2B5EF4-FFF2-40B4-BE49-F238E27FC236}">
-                <a16:creationId xmlns:a16="http://schemas.microsoft.com/office/drawing/2014/main" id="{25144D65-6BBF-4EAA-8C07-F82DC800F04B}"/>
+                <a16:creationId xmlns:a16="http://schemas.microsoft.com/office/drawing/2014/main" id="{824C509E-D6B4-4D97-BB16-3BC58FEA31DB}"/>
               </a:ext>
             </a:extLst>
           </p:cNvPr>
@@ -5920,7 +5920,7 @@
     </p:spTree>
     <p:extLst>
       <p:ext uri="{BB962C8B-B14F-4D97-AF65-F5344CB8AC3E}">
-        <p14:creationId xmlns:p14="http://schemas.microsoft.com/office/powerpoint/2010/main" val="1619743358"/>
+        <p14:creationId xmlns:p14="http://schemas.microsoft.com/office/powerpoint/2010/main" val="1884984852"/>
       </p:ext>
     </p:extLst>
   </p:cSld>
